--- a/Ecnomic_political_inequality/Austria_Inequality_Trends.pptx
+++ b/Ecnomic_political_inequality/Austria_Inequality_Trends.pptx
@@ -5401,7 +5401,7 @@
               <a:defRPr sz="1300"/>
             </a:pPr>
             <a:r>
-              <a:t>[1] Institute for Fiscal Studies (2023). Inequality in Austria in recent decades.</a:t>
+              <a:t>[1] Oesterreichische Nationalbank (OeNB) (2024). Eurosystem Household Finance and Consumption Survey (HFCS) 2023.</a:t>
             </a:r>
           </a:p>
           <a:p>
@@ -5412,7 +5412,7 @@
               <a:defRPr sz="1300"/>
             </a:pPr>
             <a:r>
-              <a:t>[2] Stone Center on Socio-Economic Inequality (2022). Under Pressure: The Squeezed Middle Class.</a:t>
+              <a:t>[2] PubMed (2022). A Tale of Integration? The Migrant Wealth Gap in Austria.</a:t>
             </a:r>
           </a:p>
           <a:p>
@@ -5423,7 +5423,7 @@
               <a:defRPr sz="1300"/>
             </a:pPr>
             <a:r>
-              <a:t>[3] Oesterreichische Nationalbank (OeNB) (2024). Eurosystem Household Finance and Consumption Survey (HFCS) 2023.</a:t>
+              <a:t>[3] OECD Economic Surveys: Austria 2024.</a:t>
             </a:r>
           </a:p>
           <a:p>
@@ -5434,7 +5434,7 @@
               <a:defRPr sz="1300"/>
             </a:pPr>
             <a:r>
-              <a:t>[4] JRC Publications Repository (2024). Inheritances in Austria: A model estimation of intergenerational wealth transfers.</a:t>
+              <a:t>[4] Institute for Fiscal Studies (2023). Persistent low inequality despite compositional shifts in Austria.</a:t>
             </a:r>
           </a:p>
           <a:p>
@@ -5445,7 +5445,7 @@
               <a:defRPr sz="1300"/>
             </a:pPr>
             <a:r>
-              <a:t>[5] PubMed (2022). A Tale of Integration? The Migrant Wealth Gap in Austria.</a:t>
+              <a:t>[5] Promoting social mobility in Austria - OECD.</a:t>
             </a:r>
           </a:p>
           <a:p>
@@ -5456,7 +5456,7 @@
               <a:defRPr sz="1300"/>
             </a:pPr>
             <a:r>
-              <a:t>[6] Statistics Austria (2024). Gender pay gap in Austria at 17.6%.</a:t>
+              <a:t>[6] Education and Training Monitor 2025 – Austria.</a:t>
             </a:r>
           </a:p>
           <a:p>
@@ -5467,7 +5467,7 @@
               <a:defRPr sz="1300"/>
             </a:pPr>
             <a:r>
-              <a:t>[7] OECD (2025). Gender pension gap: Pensions at a Glance.</a:t>
+              <a:t>[7] WIFO (2024). Second Year of Recession in Austria: Economic Development and Regional Disparities.</a:t>
             </a:r>
           </a:p>
           <a:p>
@@ -5478,7 +5478,7 @@
               <a:defRPr sz="1300"/>
             </a:pPr>
             <a:r>
-              <a:t>[8] WIFO (2024). Second Year of Recession in Austria: Economic Development and Regional Disparities.</a:t>
+              <a:t>[8] Statistics Austria. Economic output of most federal provinces almost unchanged in 2024.</a:t>
             </a:r>
           </a:p>
           <a:p>
@@ -5489,7 +5489,7 @@
               <a:defRPr sz="1300"/>
             </a:pPr>
             <a:r>
-              <a:t>[9] Paris-Lodron-University Salzburg (2023). Perceived Deprivation and Voter Turnout in Austria.</a:t>
+              <a:t>[9] Kontrast. Das sind die neuen Abgeordneten im Nationalrat.</a:t>
             </a:r>
           </a:p>
           <a:p>

--- a/Ecnomic_political_inequality/Austria_Inequality_Trends.pptx
+++ b/Ecnomic_political_inequality/Austria_Inequality_Trends.pptx
@@ -5501,6 +5501,50 @@
             </a:pPr>
             <a:r>
               <a:t>[10] ResearchGate (2023). Right-wing populism against diploma democracy: parliamentary elites in Austria.</a:t>
+            </a:r>
+          </a:p>
+          <a:p>
+            <a:pPr>
+              <a:spcAft>
+                <a:spcPts val="400"/>
+              </a:spcAft>
+              <a:defRPr sz="1300"/>
+            </a:pPr>
+            <a:r>
+              <a:t>[11] Stone Center on Socio-Economic Inequality (2022). Under Pressure: The Squeezed Middle Class.</a:t>
+            </a:r>
+          </a:p>
+          <a:p>
+            <a:pPr>
+              <a:spcAft>
+                <a:spcPts val="400"/>
+              </a:spcAft>
+              <a:defRPr sz="1300"/>
+            </a:pPr>
+            <a:r>
+              <a:t>[12] OECD (2019). Under Pressure: The Squeezed Middle Class.</a:t>
+            </a:r>
+          </a:p>
+          <a:p>
+            <a:pPr>
+              <a:spcAft>
+                <a:spcPts val="400"/>
+              </a:spcAft>
+              <a:defRPr sz="1300"/>
+            </a:pPr>
+            <a:r>
+              <a:t>[16] European Central Bank (ECB) Economic Bulletin (2022). Energy price developments and their impact on Euro Area households.</a:t>
+            </a:r>
+          </a:p>
+          <a:p>
+            <a:pPr>
+              <a:spcAft>
+                <a:spcPts val="400"/>
+              </a:spcAft>
+              <a:defRPr sz="1300"/>
+            </a:pPr>
+            <a:r>
+              <a:t>[17] Minneapolis Federal Reserve (2021). The varying pain of inflation across households.</a:t>
             </a:r>
           </a:p>
         </p:txBody>
